--- a/prezentacie/t03w.pptx
+++ b/prezentacie/t03w.pptx
@@ -4264,7 +4264,7 @@
             </a:r>
             <a:r>
               <a:rPr lang="sk-SK" sz="2800" dirty="0" err="1"/>
-              <a:t>dátove</a:t>
+              <a:t>dátové</a:t>
             </a:r>
             <a:r>
               <a:rPr lang="sk-SK" sz="2800" dirty="0"/>
